--- a/docs/submission/sewa-setu.pptx
+++ b/docs/submission/sewa-setu.pptx
@@ -6785,7 +6785,7 @@
                 </a:solidFill>
                 <a:latin typeface="Verdana"/>
               </a:rPr>
-              <a:t>310 automated tests passing, 2 skipped pending a paid model key.</a:t>
+              <a:t>314 automated tests passing, 2 skipped: they need an LLM key in the environment, and the test run has none.</a:t>
             </a:r>
           </a:p>
           <a:p>
@@ -6865,7 +6865,7 @@
                 </a:solidFill>
                 <a:latin typeface="Verdana"/>
               </a:rPr>
-              <a:t>4,080 lines pipeline  ·  1,402 eval harness  ·  3,179 web  ·  1,052 generator  ·  5,794 test lines</a:t>
+              <a:t>4,080 lines pipeline  ·  1,402 eval harness  ·  3,179 web  ·  1,052 generator  ·  5,819 test lines</a:t>
             </a:r>
           </a:p>
         </p:txBody>
